--- a/dist/초3/국어/발표와쓰기/초3_국어_발표와쓰기_03_마음을전하는편지_학생용.pptx
+++ b/dist/초3/국어/발표와쓰기/초3_국어_발표와쓰기_03_마음을전하는편지_학생용.pptx
@@ -118,38 +118,38 @@
   <p:extLst>
     <p:ext uri="{521415D9-36F7-43E2-AB2F-B90AF26B5E84}">
       <p14:sectionLst xmlns:p14="http://schemas.microsoft.com/office/powerpoint/2010/main">
-        <p14:section name="도입" id="{97dba485-91b0-a902-7e9e-11d8f727ec68}">
+        <p14:section name="도입" id="{81f09226-59b5-26ba-077e-3abe51a254d2}">
           <p14:sldIdLst>
             <p14:sldId id="256"/>
             <p14:sldId id="257"/>
           </p14:sldIdLst>
         </p14:section>
-        <p14:section name="개념" id="{6679cf40-614d-3bf7-24d5-abade4329a9d}">
+        <p14:section name="개념" id="{e6eba06d-fe5e-592e-27b4-90fadbf54498}">
           <p14:sldIdLst>
             <p14:sldId id="258"/>
             <p14:sldId id="259"/>
             <p14:sldId id="260"/>
           </p14:sldIdLst>
         </p14:section>
-        <p14:section name="연습" id="{3bbb889f-c69e-7f92-6daf-a4178ece3850}">
+        <p14:section name="연습" id="{8e391400-a642-6fe7-5ace-adc3139b4306}">
           <p14:sldIdLst>
             <p14:sldId id="261"/>
             <p14:sldId id="262"/>
             <p14:sldId id="263"/>
           </p14:sldIdLst>
         </p14:section>
-        <p14:section name="확인" id="{53d2e693-6eb2-9c42-44bd-51a483ae0555}">
+        <p14:section name="확인" id="{00a134ba-250b-8839-75cb-81b19473159f}">
           <p14:sldIdLst>
             <p14:sldId id="264"/>
             <p14:sldId id="265"/>
           </p14:sldIdLst>
         </p14:section>
-        <p14:section name="정리" id="{da44cb4b-74e9-9db6-0932-dd12b84cd6e2}">
+        <p14:section name="정리" id="{24572787-0d7f-2b37-8a97-8b4d64037b35}">
           <p14:sldIdLst>
             <p14:sldId id="266"/>
           </p14:sldIdLst>
         </p14:section>
-        <p14:section name="보충" id="{c4d71727-6a08-5077-5594-06cb49b82bf7}">
+        <p14:section name="보충" id="{506b1f74-b41f-961d-4664-0bd6bbfd65ce}">
           <p14:sldIdLst>
             <p14:sldId id="267"/>
           </p14:sldIdLst>
@@ -2605,7 +2605,7 @@
           <a:bodyPr wrap="square" lIns="0" tIns="0" rIns="0" bIns="0" rtlCol="0" anchor="ctr"/>
           <a:lstStyle/>
           <a:p>
-            <a:pPr algn="l" indent="0" marL="0">
+            <a:pPr eaLnBrk="0" algn="l" indent="0" marL="0">
               <a:buNone/>
             </a:pPr>
             <a:r>
@@ -2646,7 +2646,7 @@
           <a:bodyPr wrap="square" lIns="0" tIns="0" rIns="0" bIns="0" rtlCol="0" anchor="t"/>
           <a:lstStyle/>
           <a:p>
-            <a:pPr indent="0" marL="0">
+            <a:pPr eaLnBrk="0" indent="0" marL="0">
               <a:buNone/>
             </a:pPr>
             <a:r>
@@ -2712,7 +2712,7 @@
           <a:bodyPr wrap="square" lIns="0" tIns="0" rIns="0" bIns="0" rtlCol="0" anchor="ctr"/>
           <a:lstStyle/>
           <a:p>
-            <a:pPr indent="0" marL="0">
+            <a:pPr eaLnBrk="0" indent="0" marL="0">
               <a:spcAft>
                 <a:spcPts val="600"/>
               </a:spcAft>
@@ -2732,7 +2732,7 @@
             <a:endParaRPr lang="ko-KR" sz="3000" dirty="0"/>
           </a:p>
           <a:p>
-            <a:pPr indent="0" marL="0">
+            <a:pPr eaLnBrk="0" indent="0" marL="0">
               <a:spcAft>
                 <a:spcPts val="600"/>
               </a:spcAft>
@@ -2752,7 +2752,7 @@
             <a:endParaRPr lang="ko-KR" sz="3000" dirty="0"/>
           </a:p>
           <a:p>
-            <a:pPr indent="0" marL="0">
+            <a:pPr eaLnBrk="0" indent="0" marL="0">
               <a:spcAft>
                 <a:spcPts val="600"/>
               </a:spcAft>
@@ -2821,7 +2821,7 @@
           <a:bodyPr wrap="square" lIns="0" tIns="0" rIns="0" bIns="0" rtlCol="0" anchor="ctr"/>
           <a:lstStyle/>
           <a:p>
-            <a:pPr algn="l" indent="0" marL="0">
+            <a:pPr eaLnBrk="0" algn="l" indent="0" marL="0">
               <a:buNone/>
             </a:pPr>
             <a:r>
@@ -2887,7 +2887,7 @@
           <a:bodyPr wrap="square" lIns="0" tIns="0" rIns="0" bIns="0" rtlCol="0" anchor="ctr"/>
           <a:lstStyle/>
           <a:p>
-            <a:pPr indent="0" marL="0">
+            <a:pPr eaLnBrk="0" indent="0" marL="0">
               <a:spcAft>
                 <a:spcPts val="600"/>
               </a:spcAft>
@@ -2937,7 +2937,7 @@
           <a:bodyPr wrap="square" lIns="0" tIns="0" rIns="0" bIns="0" rtlCol="0" anchor="ctr"/>
           <a:lstStyle/>
           <a:p>
-            <a:pPr algn="ctr" indent="0" marL="0">
+            <a:pPr eaLnBrk="0" algn="ctr" indent="0" marL="0">
               <a:buNone/>
             </a:pPr>
             <a:r>
@@ -3003,7 +3003,7 @@
           <a:bodyPr wrap="square" lIns="0" tIns="0" rIns="0" bIns="0" rtlCol="0" anchor="ctr"/>
           <a:lstStyle/>
           <a:p>
-            <a:pPr indent="0" marL="0">
+            <a:pPr eaLnBrk="0" indent="0" marL="0">
               <a:spcAft>
                 <a:spcPts val="600"/>
               </a:spcAft>
@@ -3053,7 +3053,7 @@
           <a:bodyPr wrap="square" lIns="0" tIns="0" rIns="0" bIns="0" rtlCol="0" anchor="ctr"/>
           <a:lstStyle/>
           <a:p>
-            <a:pPr algn="ctr" indent="0" marL="0">
+            <a:pPr eaLnBrk="0" algn="ctr" indent="0" marL="0">
               <a:buNone/>
             </a:pPr>
             <a:r>
@@ -3119,7 +3119,7 @@
           <a:bodyPr wrap="square" lIns="0" tIns="0" rIns="0" bIns="0" rtlCol="0" anchor="ctr"/>
           <a:lstStyle/>
           <a:p>
-            <a:pPr indent="0" marL="0">
+            <a:pPr eaLnBrk="0" indent="0" marL="0">
               <a:spcAft>
                 <a:spcPts val="600"/>
               </a:spcAft>
@@ -3139,7 +3139,7 @@
             <a:endParaRPr lang="ko-KR" sz="3000" dirty="0"/>
           </a:p>
           <a:p>
-            <a:pPr indent="0" marL="0">
+            <a:pPr eaLnBrk="0" indent="0" marL="0">
               <a:spcAft>
                 <a:spcPts val="600"/>
               </a:spcAft>
@@ -3189,7 +3189,7 @@
           <a:bodyPr wrap="square" lIns="0" tIns="0" rIns="0" bIns="0" rtlCol="0" anchor="ctr"/>
           <a:lstStyle/>
           <a:p>
-            <a:pPr algn="ctr" indent="0" marL="0">
+            <a:pPr eaLnBrk="0" algn="ctr" indent="0" marL="0">
               <a:buNone/>
             </a:pPr>
             <a:r>
@@ -3255,7 +3255,7 @@
           <a:bodyPr wrap="square" lIns="0" tIns="0" rIns="0" bIns="0" rtlCol="0" anchor="ctr"/>
           <a:lstStyle/>
           <a:p>
-            <a:pPr indent="0" marL="0">
+            <a:pPr eaLnBrk="0" indent="0" marL="0">
               <a:spcAft>
                 <a:spcPts val="600"/>
               </a:spcAft>
@@ -3315,7 +3315,7 @@
             </a:lvl1pPr>
           </a:lstStyle>
           <a:p>
-            <a:pPr algn="r"/>
+            <a:pPr eaLnBrk="0" algn="r"/>
             <a:fld id="{F7021451-1387-4CA6-816F-3879F97B5CBC}" type="slidenum">
               <a:rPr b="0" lang="en-US"/>
               <a:t>10</a:t>
@@ -3372,7 +3372,7 @@
           <a:bodyPr wrap="square" lIns="0" tIns="0" rIns="0" bIns="0" rtlCol="0" anchor="ctr"/>
           <a:lstStyle/>
           <a:p>
-            <a:pPr algn="l" indent="0" marL="0">
+            <a:pPr eaLnBrk="0" algn="l" indent="0" marL="0">
               <a:buNone/>
             </a:pPr>
             <a:r>
@@ -3438,7 +3438,7 @@
           <a:bodyPr wrap="square" lIns="0" tIns="0" rIns="0" bIns="0" rtlCol="0" anchor="ctr"/>
           <a:lstStyle/>
           <a:p>
-            <a:pPr indent="0" marL="0">
+            <a:pPr eaLnBrk="0" indent="0" marL="0">
               <a:spcAft>
                 <a:spcPts val="600"/>
               </a:spcAft>
@@ -3458,7 +3458,7 @@
             <a:endParaRPr lang="ko-KR" sz="3000" dirty="0"/>
           </a:p>
           <a:p>
-            <a:pPr indent="0" marL="0">
+            <a:pPr eaLnBrk="0" indent="0" marL="0">
               <a:spcAft>
                 <a:spcPts val="600"/>
               </a:spcAft>
@@ -3508,7 +3508,7 @@
           <a:bodyPr wrap="square" lIns="177800" tIns="0" rIns="177800" bIns="0" rtlCol="0" anchor="ctr"/>
           <a:lstStyle/>
           <a:p>
-            <a:pPr algn="l" indent="0" marL="0">
+            <a:pPr eaLnBrk="0" algn="l" indent="0" marL="0">
               <a:buNone/>
             </a:pPr>
             <a:r>
@@ -3555,7 +3555,7 @@
           <a:bodyPr wrap="square" lIns="177800" tIns="0" rIns="177800" bIns="0" rtlCol="0" anchor="ctr"/>
           <a:lstStyle/>
           <a:p>
-            <a:pPr algn="l" indent="0" marL="0">
+            <a:pPr eaLnBrk="0" algn="l" indent="0" marL="0">
               <a:buNone/>
             </a:pPr>
             <a:r>
@@ -3594,7 +3594,7 @@
           <a:bodyPr wrap="square" lIns="0" tIns="0" rIns="0" bIns="0" rtlCol="0" anchor="t"/>
           <a:lstStyle/>
           <a:p>
-            <a:pPr algn="l" indent="0" marL="0">
+            <a:pPr eaLnBrk="0" algn="l" indent="0" marL="0">
               <a:buNone/>
             </a:pPr>
             <a:r>
@@ -3633,7 +3633,7 @@
           <a:bodyPr wrap="square" lIns="0" tIns="0" rIns="0" bIns="0" rtlCol="0" anchor="ctr"/>
           <a:lstStyle/>
           <a:p>
-            <a:pPr algn="l" indent="0" marL="0">
+            <a:pPr eaLnBrk="0" algn="l" indent="0" marL="0">
               <a:buNone/>
             </a:pPr>
             <a:r>
@@ -3672,7 +3672,7 @@
           <a:bodyPr wrap="square" lIns="0" tIns="0" rIns="0" bIns="0" rtlCol="0" anchor="ctr"/>
           <a:lstStyle/>
           <a:p>
-            <a:pPr algn="l" indent="0" marL="0">
+            <a:pPr eaLnBrk="0" algn="l" indent="0" marL="0">
               <a:buNone/>
             </a:pPr>
             <a:r>
@@ -3711,7 +3711,7 @@
           <a:bodyPr wrap="square" lIns="0" tIns="0" rIns="0" bIns="0" rtlCol="0" anchor="ctr"/>
           <a:lstStyle/>
           <a:p>
-            <a:pPr algn="l" indent="0" marL="0">
+            <a:pPr eaLnBrk="0" algn="l" indent="0" marL="0">
               <a:buNone/>
             </a:pPr>
             <a:r>
@@ -3750,7 +3750,7 @@
           <a:bodyPr wrap="square" lIns="0" tIns="0" rIns="0" bIns="0" rtlCol="0" anchor="ctr"/>
           <a:lstStyle/>
           <a:p>
-            <a:pPr algn="l" indent="0" marL="0">
+            <a:pPr eaLnBrk="0" algn="l" indent="0" marL="0">
               <a:buNone/>
             </a:pPr>
             <a:r>
@@ -3807,7 +3807,7 @@
             </a:lvl1pPr>
           </a:lstStyle>
           <a:p>
-            <a:pPr algn="r"/>
+            <a:pPr eaLnBrk="0" algn="r"/>
             <a:fld id="{F7021451-1387-4CA6-816F-3879F97B5CBC}" type="slidenum">
               <a:rPr b="0" lang="en-US"/>
               <a:t>11</a:t>
@@ -3864,7 +3864,7 @@
           <a:bodyPr wrap="square" lIns="0" tIns="0" rIns="0" bIns="0" rtlCol="0" anchor="ctr"/>
           <a:lstStyle/>
           <a:p>
-            <a:pPr algn="l" indent="0" marL="0">
+            <a:pPr eaLnBrk="0" algn="l" indent="0" marL="0">
               <a:buNone/>
             </a:pPr>
             <a:r>
@@ -3903,7 +3903,7 @@
           <a:bodyPr wrap="square" lIns="0" tIns="0" rIns="0" bIns="0" rtlCol="0" anchor="ctr"/>
           <a:lstStyle/>
           <a:p>
-            <a:pPr algn="l" indent="0" marL="0">
+            <a:pPr eaLnBrk="0" algn="l" indent="0" marL="0">
               <a:buNone/>
             </a:pPr>
             <a:r>
@@ -3969,7 +3969,7 @@
           <a:bodyPr wrap="square" lIns="0" tIns="0" rIns="0" bIns="0" rtlCol="0" anchor="ctr"/>
           <a:lstStyle/>
           <a:p>
-            <a:pPr indent="0" marL="0">
+            <a:pPr eaLnBrk="0" indent="0" marL="0">
               <a:spcAft>
                 <a:spcPts val="600"/>
               </a:spcAft>
@@ -4038,7 +4038,7 @@
           <a:bodyPr wrap="square" lIns="0" tIns="0" rIns="0" bIns="0" rtlCol="0" anchor="ctr"/>
           <a:lstStyle/>
           <a:p>
-            <a:pPr indent="0" marL="0">
+            <a:pPr eaLnBrk="0" indent="0" marL="0">
               <a:spcAft>
                 <a:spcPts val="600"/>
               </a:spcAft>
@@ -4058,7 +4058,7 @@
             <a:endParaRPr lang="ko-KR" sz="3000" dirty="0"/>
           </a:p>
           <a:p>
-            <a:pPr indent="0" marL="0">
+            <a:pPr eaLnBrk="0" indent="0" marL="0">
               <a:spcAft>
                 <a:spcPts val="600"/>
               </a:spcAft>
@@ -4127,7 +4127,7 @@
           <a:bodyPr wrap="square" lIns="0" tIns="0" rIns="0" bIns="0" rtlCol="0" anchor="ctr"/>
           <a:lstStyle/>
           <a:p>
-            <a:pPr indent="0" marL="0">
+            <a:pPr eaLnBrk="0" indent="0" marL="0">
               <a:spcAft>
                 <a:spcPts val="600"/>
               </a:spcAft>
@@ -4147,7 +4147,7 @@
             <a:endParaRPr lang="ko-KR" sz="3000" dirty="0"/>
           </a:p>
           <a:p>
-            <a:pPr indent="0" marL="0">
+            <a:pPr eaLnBrk="0" indent="0" marL="0">
               <a:spcAft>
                 <a:spcPts val="600"/>
               </a:spcAft>
@@ -4216,7 +4216,7 @@
           <a:bodyPr wrap="square" lIns="0" tIns="0" rIns="0" bIns="0" rtlCol="0" anchor="ctr"/>
           <a:lstStyle/>
           <a:p>
-            <a:pPr indent="0" marL="0">
+            <a:pPr eaLnBrk="0" indent="0" marL="0">
               <a:spcAft>
                 <a:spcPts val="600"/>
               </a:spcAft>
@@ -4236,7 +4236,7 @@
             <a:endParaRPr lang="ko-KR" sz="3000" dirty="0"/>
           </a:p>
           <a:p>
-            <a:pPr indent="0" marL="0">
+            <a:pPr eaLnBrk="0" indent="0" marL="0">
               <a:spcAft>
                 <a:spcPts val="600"/>
               </a:spcAft>
@@ -4296,7 +4296,7 @@
             </a:lvl1pPr>
           </a:lstStyle>
           <a:p>
-            <a:pPr algn="r"/>
+            <a:pPr eaLnBrk="0" algn="r"/>
             <a:fld id="{F7021451-1387-4CA6-816F-3879F97B5CBC}" type="slidenum">
               <a:rPr b="0" lang="en-US"/>
               <a:t>12</a:t>
@@ -4353,7 +4353,7 @@
           <a:bodyPr wrap="square" lIns="0" tIns="0" rIns="0" bIns="0" rtlCol="0" anchor="ctr"/>
           <a:lstStyle/>
           <a:p>
-            <a:pPr algn="l" indent="0" marL="0">
+            <a:pPr eaLnBrk="0" algn="l" indent="0" marL="0">
               <a:buNone/>
             </a:pPr>
             <a:r>
@@ -4392,7 +4392,7 @@
           <a:bodyPr wrap="square" lIns="0" tIns="0" rIns="0" bIns="0" rtlCol="0" anchor="ctr"/>
           <a:lstStyle/>
           <a:p>
-            <a:pPr algn="l" indent="0" marL="0">
+            <a:pPr eaLnBrk="0" algn="l" indent="0" marL="0">
               <a:buNone/>
             </a:pPr>
             <a:r>
@@ -4458,7 +4458,7 @@
           <a:bodyPr wrap="square" lIns="0" tIns="0" rIns="0" bIns="0" rtlCol="0" anchor="ctr"/>
           <a:lstStyle/>
           <a:p>
-            <a:pPr indent="0" marL="0">
+            <a:pPr eaLnBrk="0" indent="0" marL="0">
               <a:spcAft>
                 <a:spcPts val="600"/>
               </a:spcAft>
@@ -4508,7 +4508,7 @@
           <a:bodyPr wrap="square" lIns="0" tIns="0" rIns="0" bIns="0" rtlCol="0" anchor="ctr"/>
           <a:lstStyle/>
           <a:p>
-            <a:pPr algn="ctr" indent="0" marL="0">
+            <a:pPr eaLnBrk="0" algn="ctr" indent="0" marL="0">
               <a:buNone/>
             </a:pPr>
             <a:r>
@@ -4547,7 +4547,7 @@
           <a:bodyPr wrap="square" lIns="0" tIns="0" rIns="0" bIns="0" rtlCol="0" anchor="ctr"/>
           <a:lstStyle/>
           <a:p>
-            <a:pPr algn="l" indent="0" marL="0">
+            <a:pPr eaLnBrk="0" algn="l" indent="0" marL="0">
               <a:buNone/>
             </a:pPr>
             <a:r>
@@ -4604,7 +4604,7 @@
             </a:lvl1pPr>
           </a:lstStyle>
           <a:p>
-            <a:pPr algn="r"/>
+            <a:pPr eaLnBrk="0" algn="r"/>
             <a:fld id="{F7021451-1387-4CA6-816F-3879F97B5CBC}" type="slidenum">
               <a:rPr b="0" lang="en-US"/>
               <a:t>2</a:t>
@@ -4661,7 +4661,7 @@
           <a:bodyPr wrap="square" lIns="0" tIns="0" rIns="0" bIns="0" rtlCol="0" anchor="ctr"/>
           <a:lstStyle/>
           <a:p>
-            <a:pPr algn="l" indent="0" marL="0">
+            <a:pPr eaLnBrk="0" algn="l" indent="0" marL="0">
               <a:buNone/>
             </a:pPr>
             <a:r>
@@ -4727,7 +4727,7 @@
           <a:bodyPr wrap="square" lIns="0" tIns="0" rIns="0" bIns="0" rtlCol="0" anchor="t"/>
           <a:lstStyle/>
           <a:p>
-            <a:pPr indent="0" marL="0">
+            <a:pPr eaLnBrk="0" algn="l" indent="0" marL="0">
               <a:lnSpc>
                 <a:spcPct val="105000"/>
               </a:lnSpc>
@@ -4750,7 +4750,7 @@
             <a:endParaRPr lang="ko-KR" sz="3000" dirty="0"/>
           </a:p>
           <a:p>
-            <a:pPr indent="0" marL="0">
+            <a:pPr eaLnBrk="0" algn="l" indent="0" marL="0">
               <a:lnSpc>
                 <a:spcPct val="105000"/>
               </a:lnSpc>
@@ -4773,7 +4773,7 @@
             <a:endParaRPr lang="ko-KR" sz="3000" dirty="0"/>
           </a:p>
           <a:p>
-            <a:pPr indent="0" marL="0">
+            <a:pPr eaLnBrk="0" algn="l" indent="0" marL="0">
               <a:lnSpc>
                 <a:spcPct val="105000"/>
               </a:lnSpc>
@@ -4796,7 +4796,7 @@
             <a:endParaRPr lang="ko-KR" sz="3000" dirty="0"/>
           </a:p>
           <a:p>
-            <a:pPr indent="0" marL="0">
+            <a:pPr eaLnBrk="0" algn="l" indent="0" marL="0">
               <a:lnSpc>
                 <a:spcPct val="105000"/>
               </a:lnSpc>
@@ -4819,7 +4819,7 @@
             <a:endParaRPr lang="ko-KR" sz="3000" dirty="0"/>
           </a:p>
           <a:p>
-            <a:pPr indent="0" marL="0">
+            <a:pPr eaLnBrk="0" algn="l" indent="0" marL="0">
               <a:lnSpc>
                 <a:spcPct val="105000"/>
               </a:lnSpc>
@@ -4842,7 +4842,7 @@
             <a:endParaRPr lang="ko-KR" sz="3000" dirty="0"/>
           </a:p>
           <a:p>
-            <a:pPr indent="0" marL="0">
+            <a:pPr eaLnBrk="0" algn="l" indent="0" marL="0">
               <a:lnSpc>
                 <a:spcPct val="105000"/>
               </a:lnSpc>
@@ -4905,7 +4905,7 @@
             </a:lvl1pPr>
           </a:lstStyle>
           <a:p>
-            <a:pPr algn="r"/>
+            <a:pPr eaLnBrk="0" algn="r"/>
             <a:fld id="{F7021451-1387-4CA6-816F-3879F97B5CBC}" type="slidenum">
               <a:rPr b="0" lang="en-US"/>
               <a:t>3</a:t>
@@ -4962,7 +4962,7 @@
           <a:bodyPr wrap="square" lIns="0" tIns="0" rIns="0" bIns="0" rtlCol="0" anchor="ctr"/>
           <a:lstStyle/>
           <a:p>
-            <a:pPr algn="l" indent="0" marL="0">
+            <a:pPr eaLnBrk="0" algn="l" indent="0" marL="0">
               <a:buNone/>
             </a:pPr>
             <a:r>
@@ -5028,7 +5028,7 @@
           <a:bodyPr wrap="square" lIns="0" tIns="0" rIns="0" bIns="0" rtlCol="0" anchor="ctr"/>
           <a:lstStyle/>
           <a:p>
-            <a:pPr indent="0" marL="0">
+            <a:pPr eaLnBrk="0" indent="0" marL="0">
               <a:spcAft>
                 <a:spcPts val="600"/>
               </a:spcAft>
@@ -5081,7 +5081,7 @@
                     <a:bodyPr/>
                     <a:lstStyle/>
                     <a:p>
-                      <a:pPr algn="ctr" indent="0" marL="0">
+                      <a:pPr eaLnBrk="0" algn="ctr" indent="0" marL="0">
                         <a:buNone/>
                       </a:pPr>
                       <a:r>
@@ -5149,7 +5149,7 @@
                     <a:bodyPr/>
                     <a:lstStyle/>
                     <a:p>
-                      <a:pPr algn="ctr" indent="0" marL="0">
+                      <a:pPr eaLnBrk="0" algn="ctr" indent="0" marL="0">
                         <a:buNone/>
                       </a:pPr>
                       <a:r>
@@ -5219,7 +5219,7 @@
                     <a:bodyPr/>
                     <a:lstStyle/>
                     <a:p>
-                      <a:pPr algn="ctr" indent="0" marL="0">
+                      <a:pPr eaLnBrk="0" algn="ctr" indent="0" marL="0">
                         <a:buNone/>
                       </a:pPr>
                       <a:r>
@@ -5287,7 +5287,7 @@
                     <a:bodyPr/>
                     <a:lstStyle/>
                     <a:p>
-                      <a:pPr algn="ctr" indent="0" marL="0">
+                      <a:pPr eaLnBrk="0" algn="ctr" indent="0" marL="0">
                         <a:buNone/>
                       </a:pPr>
                       <a:r>
@@ -5357,7 +5357,7 @@
                     <a:bodyPr/>
                     <a:lstStyle/>
                     <a:p>
-                      <a:pPr algn="ctr" indent="0" marL="0">
+                      <a:pPr eaLnBrk="0" algn="ctr" indent="0" marL="0">
                         <a:buNone/>
                       </a:pPr>
                       <a:r>
@@ -5425,7 +5425,7 @@
                     <a:bodyPr/>
                     <a:lstStyle/>
                     <a:p>
-                      <a:pPr algn="ctr" indent="0" marL="0">
+                      <a:pPr eaLnBrk="0" algn="ctr" indent="0" marL="0">
                         <a:buNone/>
                       </a:pPr>
                       <a:r>
@@ -5495,7 +5495,7 @@
                     <a:bodyPr/>
                     <a:lstStyle/>
                     <a:p>
-                      <a:pPr algn="ctr" indent="0" marL="0">
+                      <a:pPr eaLnBrk="0" algn="ctr" indent="0" marL="0">
                         <a:buNone/>
                       </a:pPr>
                       <a:r>
@@ -5563,7 +5563,7 @@
                     <a:bodyPr/>
                     <a:lstStyle/>
                     <a:p>
-                      <a:pPr algn="ctr" indent="0" marL="0">
+                      <a:pPr eaLnBrk="0" algn="ctr" indent="0" marL="0">
                         <a:buNone/>
                       </a:pPr>
                       <a:r>
@@ -5633,7 +5633,7 @@
                     <a:bodyPr/>
                     <a:lstStyle/>
                     <a:p>
-                      <a:pPr algn="ctr" indent="0" marL="0">
+                      <a:pPr eaLnBrk="0" algn="ctr" indent="0" marL="0">
                         <a:buNone/>
                       </a:pPr>
                       <a:r>
@@ -5701,7 +5701,7 @@
                     <a:bodyPr/>
                     <a:lstStyle/>
                     <a:p>
-                      <a:pPr algn="ctr" indent="0" marL="0">
+                      <a:pPr eaLnBrk="0" algn="ctr" indent="0" marL="0">
                         <a:buNone/>
                       </a:pPr>
                       <a:r>
@@ -5771,7 +5771,7 @@
                     <a:bodyPr/>
                     <a:lstStyle/>
                     <a:p>
-                      <a:pPr algn="ctr" indent="0" marL="0">
+                      <a:pPr eaLnBrk="0" algn="ctr" indent="0" marL="0">
                         <a:buNone/>
                       </a:pPr>
                       <a:r>
@@ -5839,7 +5839,7 @@
                     <a:bodyPr/>
                     <a:lstStyle/>
                     <a:p>
-                      <a:pPr algn="ctr" indent="0" marL="0">
+                      <a:pPr eaLnBrk="0" algn="ctr" indent="0" marL="0">
                         <a:buNone/>
                       </a:pPr>
                       <a:r>
@@ -5909,7 +5909,7 @@
                     <a:bodyPr/>
                     <a:lstStyle/>
                     <a:p>
-                      <a:pPr algn="ctr" indent="0" marL="0">
+                      <a:pPr eaLnBrk="0" algn="ctr" indent="0" marL="0">
                         <a:buNone/>
                       </a:pPr>
                       <a:r>
@@ -5977,7 +5977,7 @@
                     <a:bodyPr/>
                     <a:lstStyle/>
                     <a:p>
-                      <a:pPr algn="ctr" indent="0" marL="0">
+                      <a:pPr eaLnBrk="0" algn="ctr" indent="0" marL="0">
                         <a:buNone/>
                       </a:pPr>
                       <a:r>
@@ -6084,7 +6084,7 @@
             </a:lvl1pPr>
           </a:lstStyle>
           <a:p>
-            <a:pPr algn="r"/>
+            <a:pPr eaLnBrk="0" algn="r"/>
             <a:fld id="{F7021451-1387-4CA6-816F-3879F97B5CBC}" type="slidenum">
               <a:rPr b="0" lang="en-US"/>
               <a:t>4</a:t>
@@ -6141,7 +6141,7 @@
           <a:bodyPr wrap="square" lIns="0" tIns="0" rIns="0" bIns="0" rtlCol="0" anchor="ctr"/>
           <a:lstStyle/>
           <a:p>
-            <a:pPr algn="l" indent="0" marL="0">
+            <a:pPr eaLnBrk="0" algn="l" indent="0" marL="0">
               <a:buNone/>
             </a:pPr>
             <a:r>
@@ -6207,7 +6207,7 @@
           <a:bodyPr wrap="square" lIns="0" tIns="0" rIns="0" bIns="0" rtlCol="0" anchor="ctr"/>
           <a:lstStyle/>
           <a:p>
-            <a:pPr indent="0" marL="0">
+            <a:pPr eaLnBrk="0" indent="0" marL="0">
               <a:spcAft>
                 <a:spcPts val="600"/>
               </a:spcAft>
@@ -6276,7 +6276,7 @@
           <a:bodyPr wrap="square" lIns="0" tIns="0" rIns="0" bIns="0" rtlCol="0" anchor="ctr"/>
           <a:lstStyle/>
           <a:p>
-            <a:pPr indent="0" marL="0">
+            <a:pPr eaLnBrk="0" indent="0" marL="0">
               <a:spcAft>
                 <a:spcPts val="600"/>
               </a:spcAft>
@@ -6296,7 +6296,7 @@
             <a:endParaRPr lang="ko-KR" sz="3000" dirty="0"/>
           </a:p>
           <a:p>
-            <a:pPr indent="0" marL="0">
+            <a:pPr eaLnBrk="0" indent="0" marL="0">
               <a:spcAft>
                 <a:spcPts val="600"/>
               </a:spcAft>
@@ -6365,7 +6365,7 @@
           <a:bodyPr wrap="square" lIns="0" tIns="0" rIns="0" bIns="0" rtlCol="0" anchor="ctr"/>
           <a:lstStyle/>
           <a:p>
-            <a:pPr indent="0" marL="0">
+            <a:pPr eaLnBrk="0" indent="0" marL="0">
               <a:spcAft>
                 <a:spcPts val="600"/>
               </a:spcAft>
@@ -6385,7 +6385,7 @@
             <a:endParaRPr lang="ko-KR" sz="3000" dirty="0"/>
           </a:p>
           <a:p>
-            <a:pPr indent="0" marL="0">
+            <a:pPr eaLnBrk="0" indent="0" marL="0">
               <a:spcAft>
                 <a:spcPts val="600"/>
               </a:spcAft>
@@ -6454,7 +6454,7 @@
           <a:bodyPr wrap="square" lIns="0" tIns="0" rIns="0" bIns="0" rtlCol="0" anchor="ctr"/>
           <a:lstStyle/>
           <a:p>
-            <a:pPr indent="0" marL="0">
+            <a:pPr eaLnBrk="0" indent="0" marL="0">
               <a:spcAft>
                 <a:spcPts val="600"/>
               </a:spcAft>
@@ -6474,7 +6474,7 @@
             <a:endParaRPr lang="ko-KR" sz="3000" dirty="0"/>
           </a:p>
           <a:p>
-            <a:pPr indent="0" marL="0">
+            <a:pPr eaLnBrk="0" indent="0" marL="0">
               <a:spcAft>
                 <a:spcPts val="600"/>
               </a:spcAft>
@@ -6534,7 +6534,7 @@
             </a:lvl1pPr>
           </a:lstStyle>
           <a:p>
-            <a:pPr algn="r"/>
+            <a:pPr eaLnBrk="0" algn="r"/>
             <a:fld id="{F7021451-1387-4CA6-816F-3879F97B5CBC}" type="slidenum">
               <a:rPr b="0" lang="en-US"/>
               <a:t>5</a:t>
@@ -6591,7 +6591,7 @@
           <a:bodyPr wrap="square" lIns="0" tIns="0" rIns="0" bIns="0" rtlCol="0" anchor="ctr"/>
           <a:lstStyle/>
           <a:p>
-            <a:pPr algn="l" indent="0" marL="0">
+            <a:pPr eaLnBrk="0" algn="l" indent="0" marL="0">
               <a:buNone/>
             </a:pPr>
             <a:r>
@@ -6657,7 +6657,7 @@
           <a:bodyPr wrap="square" lIns="0" tIns="0" rIns="0" bIns="0" rtlCol="0" anchor="ctr"/>
           <a:lstStyle/>
           <a:p>
-            <a:pPr indent="0" marL="0">
+            <a:pPr eaLnBrk="0" indent="0" marL="0">
               <a:spcAft>
                 <a:spcPts val="600"/>
               </a:spcAft>
@@ -6726,7 +6726,7 @@
           <a:bodyPr wrap="square" lIns="0" tIns="0" rIns="0" bIns="0" rtlCol="0" anchor="t"/>
           <a:lstStyle/>
           <a:p>
-            <a:pPr indent="0" marL="0">
+            <a:pPr eaLnBrk="0" algn="l" indent="0" marL="0">
               <a:lnSpc>
                 <a:spcPct val="105000"/>
               </a:lnSpc>
@@ -6749,7 +6749,7 @@
             <a:endParaRPr lang="ko-KR" sz="2400" dirty="0"/>
           </a:p>
           <a:p>
-            <a:pPr indent="0" marL="0">
+            <a:pPr eaLnBrk="0" algn="l" indent="0" marL="0">
               <a:lnSpc>
                 <a:spcPct val="105000"/>
               </a:lnSpc>
@@ -6772,7 +6772,7 @@
             <a:endParaRPr lang="ko-KR" sz="2400" dirty="0"/>
           </a:p>
           <a:p>
-            <a:pPr indent="0" marL="0">
+            <a:pPr eaLnBrk="0" algn="l" indent="0" marL="0">
               <a:lnSpc>
                 <a:spcPct val="105000"/>
               </a:lnSpc>
@@ -6795,7 +6795,7 @@
             <a:endParaRPr lang="ko-KR" sz="2400" dirty="0"/>
           </a:p>
           <a:p>
-            <a:pPr indent="0" marL="0">
+            <a:pPr eaLnBrk="0" algn="l" indent="0" marL="0">
               <a:lnSpc>
                 <a:spcPct val="105000"/>
               </a:lnSpc>
@@ -6818,7 +6818,7 @@
             <a:endParaRPr lang="ko-KR" sz="2400" dirty="0"/>
           </a:p>
           <a:p>
-            <a:pPr indent="0" marL="0">
+            <a:pPr eaLnBrk="0" algn="l" indent="0" marL="0">
               <a:lnSpc>
                 <a:spcPct val="105000"/>
               </a:lnSpc>
@@ -6841,7 +6841,7 @@
             <a:endParaRPr lang="ko-KR" sz="2400" dirty="0"/>
           </a:p>
           <a:p>
-            <a:pPr indent="0" marL="0">
+            <a:pPr eaLnBrk="0" algn="l" indent="0" marL="0">
               <a:lnSpc>
                 <a:spcPct val="105000"/>
               </a:lnSpc>
@@ -6904,7 +6904,7 @@
             </a:lvl1pPr>
           </a:lstStyle>
           <a:p>
-            <a:pPr algn="r"/>
+            <a:pPr eaLnBrk="0" algn="r"/>
             <a:fld id="{F7021451-1387-4CA6-816F-3879F97B5CBC}" type="slidenum">
               <a:rPr b="0" lang="en-US"/>
               <a:t>6</a:t>
@@ -6961,7 +6961,7 @@
           <a:bodyPr wrap="square" lIns="0" tIns="0" rIns="0" bIns="0" rtlCol="0" anchor="ctr"/>
           <a:lstStyle/>
           <a:p>
-            <a:pPr algn="l" indent="0" marL="0">
+            <a:pPr eaLnBrk="0" algn="l" indent="0" marL="0">
               <a:buNone/>
             </a:pPr>
             <a:r>
@@ -7027,7 +7027,7 @@
           <a:bodyPr wrap="square" lIns="0" tIns="0" rIns="0" bIns="0" rtlCol="0" anchor="ctr"/>
           <a:lstStyle/>
           <a:p>
-            <a:pPr indent="0" marL="0">
+            <a:pPr eaLnBrk="0" indent="0" marL="0">
               <a:spcAft>
                 <a:spcPts val="600"/>
               </a:spcAft>
@@ -7096,7 +7096,7 @@
           <a:bodyPr wrap="square" lIns="0" tIns="0" rIns="0" bIns="0" rtlCol="0" anchor="ctr"/>
           <a:lstStyle/>
           <a:p>
-            <a:pPr indent="0" marL="0">
+            <a:pPr eaLnBrk="0" indent="0" marL="0">
               <a:spcAft>
                 <a:spcPts val="600"/>
               </a:spcAft>
@@ -7146,7 +7146,7 @@
           <a:bodyPr wrap="square" lIns="177800" tIns="0" rIns="177800" bIns="0" rtlCol="0" anchor="ctr"/>
           <a:lstStyle/>
           <a:p>
-            <a:pPr algn="l" indent="0" marL="0">
+            <a:pPr eaLnBrk="0" algn="l" indent="0" marL="0">
               <a:buNone/>
             </a:pPr>
             <a:r>
@@ -7185,7 +7185,7 @@
           <a:bodyPr wrap="square" lIns="0" tIns="0" rIns="0" bIns="0" rtlCol="0" anchor="t"/>
           <a:lstStyle/>
           <a:p>
-            <a:pPr algn="l" indent="0" marL="0">
+            <a:pPr eaLnBrk="0" algn="l" indent="0" marL="0">
               <a:buNone/>
             </a:pPr>
             <a:r>
@@ -7202,7 +7202,7 @@
             <a:endParaRPr lang="ko-KR" sz="3000" dirty="0"/>
           </a:p>
           <a:p>
-            <a:pPr algn="l" indent="0" marL="0">
+            <a:pPr eaLnBrk="0" algn="l" indent="0" marL="0">
               <a:buNone/>
             </a:pPr>
             <a:r>
@@ -7249,7 +7249,7 @@
           <a:bodyPr wrap="square" lIns="177800" tIns="0" rIns="177800" bIns="0" rtlCol="0" anchor="ctr"/>
           <a:lstStyle/>
           <a:p>
-            <a:pPr algn="l" indent="0" marL="0">
+            <a:pPr eaLnBrk="0" algn="l" indent="0" marL="0">
               <a:buNone/>
             </a:pPr>
             <a:r>
@@ -7288,7 +7288,7 @@
           <a:bodyPr wrap="square" lIns="0" tIns="0" rIns="0" bIns="0" rtlCol="0" anchor="t"/>
           <a:lstStyle/>
           <a:p>
-            <a:pPr algn="l" indent="0" marL="0">
+            <a:pPr eaLnBrk="0" algn="l" indent="0" marL="0">
               <a:buNone/>
             </a:pPr>
             <a:r>
@@ -7305,7 +7305,7 @@
             <a:endParaRPr lang="ko-KR" sz="3000" dirty="0"/>
           </a:p>
           <a:p>
-            <a:pPr algn="l" indent="0" marL="0">
+            <a:pPr eaLnBrk="0" algn="l" indent="0" marL="0">
               <a:buNone/>
             </a:pPr>
             <a:r>
@@ -7322,7 +7322,7 @@
             <a:endParaRPr lang="ko-KR" sz="3000" dirty="0"/>
           </a:p>
           <a:p>
-            <a:pPr algn="l" indent="0" marL="0">
+            <a:pPr eaLnBrk="0" algn="l" indent="0" marL="0">
               <a:buNone/>
             </a:pPr>
             <a:r>
@@ -7379,7 +7379,7 @@
             </a:lvl1pPr>
           </a:lstStyle>
           <a:p>
-            <a:pPr algn="r"/>
+            <a:pPr eaLnBrk="0" algn="r"/>
             <a:fld id="{F7021451-1387-4CA6-816F-3879F97B5CBC}" type="slidenum">
               <a:rPr b="0" lang="en-US"/>
               <a:t>7</a:t>
@@ -7436,7 +7436,7 @@
           <a:bodyPr wrap="square" lIns="0" tIns="0" rIns="0" bIns="0" rtlCol="0" anchor="ctr"/>
           <a:lstStyle/>
           <a:p>
-            <a:pPr algn="l" indent="0" marL="0">
+            <a:pPr eaLnBrk="0" algn="l" indent="0" marL="0">
               <a:buNone/>
             </a:pPr>
             <a:r>
@@ -7475,7 +7475,7 @@
           <a:bodyPr wrap="square" lIns="0" tIns="0" rIns="0" bIns="0" rtlCol="0" anchor="ctr"/>
           <a:lstStyle/>
           <a:p>
-            <a:pPr algn="l" indent="0" marL="0">
+            <a:pPr eaLnBrk="0" algn="l" indent="0" marL="0">
               <a:buNone/>
             </a:pPr>
             <a:r>
@@ -7541,7 +7541,7 @@
           <a:bodyPr wrap="square" lIns="0" tIns="0" rIns="0" bIns="0" rtlCol="0" anchor="ctr"/>
           <a:lstStyle/>
           <a:p>
-            <a:pPr indent="0" marL="0">
+            <a:pPr eaLnBrk="0" indent="0" marL="0">
               <a:spcAft>
                 <a:spcPts val="600"/>
               </a:spcAft>
@@ -7591,7 +7591,7 @@
           <a:bodyPr wrap="square" lIns="0" tIns="0" rIns="0" bIns="0" rtlCol="0" anchor="ctr"/>
           <a:lstStyle/>
           <a:p>
-            <a:pPr algn="ctr" indent="0" marL="0">
+            <a:pPr eaLnBrk="0" algn="ctr" indent="0" marL="0">
               <a:buNone/>
             </a:pPr>
             <a:r>
@@ -7630,7 +7630,7 @@
           <a:bodyPr wrap="square" lIns="0" tIns="0" rIns="0" bIns="0" rtlCol="0" anchor="ctr"/>
           <a:lstStyle/>
           <a:p>
-            <a:pPr algn="l" indent="0" marL="0">
+            <a:pPr eaLnBrk="0" algn="l" indent="0" marL="0">
               <a:buNone/>
             </a:pPr>
             <a:r>
@@ -7677,7 +7677,7 @@
           <a:bodyPr wrap="square" lIns="0" tIns="0" rIns="0" bIns="0" rtlCol="0" anchor="ctr"/>
           <a:lstStyle/>
           <a:p>
-            <a:pPr algn="ctr" indent="0" marL="0">
+            <a:pPr eaLnBrk="0" algn="ctr" indent="0" marL="0">
               <a:buNone/>
             </a:pPr>
             <a:r>
@@ -7716,7 +7716,7 @@
           <a:bodyPr wrap="square" lIns="0" tIns="0" rIns="0" bIns="0" rtlCol="0" anchor="ctr"/>
           <a:lstStyle/>
           <a:p>
-            <a:pPr algn="l" indent="0" marL="0">
+            <a:pPr eaLnBrk="0" algn="l" indent="0" marL="0">
               <a:buNone/>
             </a:pPr>
             <a:r>
@@ -7763,7 +7763,7 @@
           <a:bodyPr wrap="square" lIns="0" tIns="0" rIns="0" bIns="0" rtlCol="0" anchor="ctr"/>
           <a:lstStyle/>
           <a:p>
-            <a:pPr algn="ctr" indent="0" marL="0">
+            <a:pPr eaLnBrk="0" algn="ctr" indent="0" marL="0">
               <a:buNone/>
             </a:pPr>
             <a:r>
@@ -7802,7 +7802,7 @@
           <a:bodyPr wrap="square" lIns="0" tIns="0" rIns="0" bIns="0" rtlCol="0" anchor="ctr"/>
           <a:lstStyle/>
           <a:p>
-            <a:pPr algn="l" indent="0" marL="0">
+            <a:pPr eaLnBrk="0" algn="l" indent="0" marL="0">
               <a:buNone/>
             </a:pPr>
             <a:r>
@@ -7859,7 +7859,7 @@
             </a:lvl1pPr>
           </a:lstStyle>
           <a:p>
-            <a:pPr algn="r"/>
+            <a:pPr eaLnBrk="0" algn="r"/>
             <a:fld id="{F7021451-1387-4CA6-816F-3879F97B5CBC}" type="slidenum">
               <a:rPr b="0" lang="en-US"/>
               <a:t>8</a:t>
@@ -7916,7 +7916,7 @@
           <a:bodyPr wrap="square" lIns="0" tIns="0" rIns="0" bIns="0" rtlCol="0" anchor="ctr"/>
           <a:lstStyle/>
           <a:p>
-            <a:pPr algn="l" indent="0" marL="0">
+            <a:pPr eaLnBrk="0" algn="l" indent="0" marL="0">
               <a:buNone/>
             </a:pPr>
             <a:r>
@@ -7982,7 +7982,7 @@
           <a:bodyPr wrap="square" lIns="0" tIns="0" rIns="0" bIns="0" rtlCol="0" anchor="ctr"/>
           <a:lstStyle/>
           <a:p>
-            <a:pPr indent="0" marL="0">
+            <a:pPr eaLnBrk="0" indent="0" marL="0">
               <a:spcAft>
                 <a:spcPts val="600"/>
               </a:spcAft>
@@ -8002,7 +8002,7 @@
             <a:endParaRPr lang="ko-KR" sz="3000" dirty="0"/>
           </a:p>
           <a:p>
-            <a:pPr indent="0" marL="0">
+            <a:pPr eaLnBrk="0" indent="0" marL="0">
               <a:spcAft>
                 <a:spcPts val="600"/>
               </a:spcAft>
@@ -8022,7 +8022,7 @@
             <a:endParaRPr lang="ko-KR" sz="3000" dirty="0"/>
           </a:p>
           <a:p>
-            <a:pPr indent="0" marL="0">
+            <a:pPr eaLnBrk="0" indent="0" marL="0">
               <a:spcAft>
                 <a:spcPts val="600"/>
               </a:spcAft>
@@ -8042,7 +8042,7 @@
             <a:endParaRPr lang="ko-KR" sz="3000" dirty="0"/>
           </a:p>
           <a:p>
-            <a:pPr indent="0" marL="0">
+            <a:pPr eaLnBrk="0" indent="0" marL="0">
               <a:spcAft>
                 <a:spcPts val="600"/>
               </a:spcAft>
@@ -8062,7 +8062,7 @@
             <a:endParaRPr lang="ko-KR" sz="3000" dirty="0"/>
           </a:p>
           <a:p>
-            <a:pPr indent="0" marL="0">
+            <a:pPr eaLnBrk="0" indent="0" marL="0">
               <a:spcAft>
                 <a:spcPts val="600"/>
               </a:spcAft>
@@ -8110,7 +8110,7 @@
           <a:bodyPr wrap="square" lIns="0" tIns="0" rIns="0" bIns="0" rtlCol="0" anchor="ctr"/>
           <a:lstStyle/>
           <a:p>
-            <a:pPr algn="ctr" indent="0" marL="0">
+            <a:pPr eaLnBrk="0" algn="ctr" indent="0" marL="0">
               <a:buNone/>
             </a:pPr>
             <a:r>
@@ -8149,7 +8149,7 @@
           <a:bodyPr wrap="square" lIns="0" tIns="0" rIns="0" bIns="0" rtlCol="0" anchor="t"/>
           <a:lstStyle/>
           <a:p>
-            <a:pPr algn="l" indent="0" marL="0">
+            <a:pPr eaLnBrk="0" algn="l" indent="0" marL="0">
               <a:buNone/>
             </a:pPr>
             <a:r>
@@ -8194,7 +8194,7 @@
           <a:bodyPr wrap="square" lIns="0" tIns="0" rIns="0" bIns="0" rtlCol="0" anchor="ctr"/>
           <a:lstStyle/>
           <a:p>
-            <a:pPr algn="ctr" indent="0" marL="0">
+            <a:pPr eaLnBrk="0" algn="ctr" indent="0" marL="0">
               <a:buNone/>
             </a:pPr>
             <a:r>
@@ -8233,7 +8233,7 @@
           <a:bodyPr wrap="square" lIns="0" tIns="0" rIns="0" bIns="0" rtlCol="0" anchor="t"/>
           <a:lstStyle/>
           <a:p>
-            <a:pPr algn="l" indent="0" marL="0">
+            <a:pPr eaLnBrk="0" algn="l" indent="0" marL="0">
               <a:buNone/>
             </a:pPr>
             <a:r>
@@ -8278,7 +8278,7 @@
           <a:bodyPr wrap="square" lIns="0" tIns="0" rIns="0" bIns="0" rtlCol="0" anchor="ctr"/>
           <a:lstStyle/>
           <a:p>
-            <a:pPr algn="ctr" indent="0" marL="0">
+            <a:pPr eaLnBrk="0" algn="ctr" indent="0" marL="0">
               <a:buNone/>
             </a:pPr>
             <a:r>
@@ -8317,7 +8317,7 @@
           <a:bodyPr wrap="square" lIns="0" tIns="0" rIns="0" bIns="0" rtlCol="0" anchor="t"/>
           <a:lstStyle/>
           <a:p>
-            <a:pPr algn="l" indent="0" marL="0">
+            <a:pPr eaLnBrk="0" algn="l" indent="0" marL="0">
               <a:buNone/>
             </a:pPr>
             <a:r>
@@ -8362,7 +8362,7 @@
           <a:bodyPr wrap="square" lIns="0" tIns="0" rIns="0" bIns="0" rtlCol="0" anchor="ctr"/>
           <a:lstStyle/>
           <a:p>
-            <a:pPr algn="ctr" indent="0" marL="0">
+            <a:pPr eaLnBrk="0" algn="ctr" indent="0" marL="0">
               <a:buNone/>
             </a:pPr>
             <a:r>
@@ -8401,7 +8401,7 @@
           <a:bodyPr wrap="square" lIns="0" tIns="0" rIns="0" bIns="0" rtlCol="0" anchor="t"/>
           <a:lstStyle/>
           <a:p>
-            <a:pPr algn="l" indent="0" marL="0">
+            <a:pPr eaLnBrk="0" algn="l" indent="0" marL="0">
               <a:buNone/>
             </a:pPr>
             <a:r>
@@ -8458,7 +8458,7 @@
             </a:lvl1pPr>
           </a:lstStyle>
           <a:p>
-            <a:pPr algn="r"/>
+            <a:pPr eaLnBrk="0" algn="r"/>
             <a:fld id="{F7021451-1387-4CA6-816F-3879F97B5CBC}" type="slidenum">
               <a:rPr b="0" lang="en-US"/>
               <a:t>9</a:t>

--- a/dist/초3/국어/발표와쓰기/초3_국어_발표와쓰기_03_마음을전하는편지_학생용.pptx
+++ b/dist/초3/국어/발표와쓰기/초3_국어_발표와쓰기_03_마음을전하는편지_학생용.pptx
@@ -118,38 +118,38 @@
   <p:extLst>
     <p:ext uri="{521415D9-36F7-43E2-AB2F-B90AF26B5E84}">
       <p14:sectionLst xmlns:p14="http://schemas.microsoft.com/office/powerpoint/2010/main">
-        <p14:section name="도입" id="{81f09226-59b5-26ba-077e-3abe51a254d2}">
+        <p14:section name="도입" id="{f01eb051-ca52-aa42-da97-268ffd29e139}">
           <p14:sldIdLst>
             <p14:sldId id="256"/>
             <p14:sldId id="257"/>
           </p14:sldIdLst>
         </p14:section>
-        <p14:section name="개념" id="{e6eba06d-fe5e-592e-27b4-90fadbf54498}">
+        <p14:section name="개념" id="{a742932d-5abe-7558-010c-4a9e0acab7e6}">
           <p14:sldIdLst>
             <p14:sldId id="258"/>
             <p14:sldId id="259"/>
             <p14:sldId id="260"/>
           </p14:sldIdLst>
         </p14:section>
-        <p14:section name="연습" id="{8e391400-a642-6fe7-5ace-adc3139b4306}">
+        <p14:section name="연습" id="{8a2fb283-d4cf-c0ba-6193-c7d8dafaa59e}">
           <p14:sldIdLst>
             <p14:sldId id="261"/>
             <p14:sldId id="262"/>
             <p14:sldId id="263"/>
           </p14:sldIdLst>
         </p14:section>
-        <p14:section name="확인" id="{00a134ba-250b-8839-75cb-81b19473159f}">
+        <p14:section name="확인" id="{f12b4d3e-6028-eb4f-79f5-ece92c9106a1}">
           <p14:sldIdLst>
             <p14:sldId id="264"/>
             <p14:sldId id="265"/>
           </p14:sldIdLst>
         </p14:section>
-        <p14:section name="정리" id="{24572787-0d7f-2b37-8a97-8b4d64037b35}">
+        <p14:section name="정리" id="{8c9729eb-54c0-458d-ce5a-796aadeed8ca}">
           <p14:sldIdLst>
             <p14:sldId id="266"/>
           </p14:sldIdLst>
         </p14:section>
-        <p14:section name="보충" id="{506b1f74-b41f-961d-4664-0bd6bbfd65ce}">
+        <p14:section name="보충" id="{0b5308a9-dfd7-5a6b-0b0a-3cbad58e7363}">
           <p14:sldIdLst>
             <p14:sldId id="267"/>
           </p14:sldIdLst>
@@ -5064,7 +5064,7 @@
           </p:nvPr>
         </p:nvGraphicFramePr>
         <p:xfrm>
-          <a:off x="1293876" y="1516380"/>
+          <a:off x="1293876" y="1569720"/>
           <a:ext cx="9601200" cy="914400"/>
         </p:xfrm>
         <a:graphic>
@@ -5075,7 +5075,7 @@
                 <a:gridCol w="3648456"/>
                 <a:gridCol w="5952744"/>
               </a:tblGrid>
-              <a:tr h="487680">
+              <a:tr h="472440">
                 <a:tc>
                   <a:txBody>
                     <a:bodyPr/>
@@ -5213,7 +5213,7 @@
                   </a:tcPr>
                 </a:tc>
               </a:tr>
-              <a:tr h="487680">
+              <a:tr h="472440">
                 <a:tc>
                   <a:txBody>
                     <a:bodyPr/>
@@ -5351,7 +5351,7 @@
                   </a:tcPr>
                 </a:tc>
               </a:tr>
-              <a:tr h="487680">
+              <a:tr h="472440">
                 <a:tc>
                   <a:txBody>
                     <a:bodyPr/>
@@ -5489,7 +5489,7 @@
                   </a:tcPr>
                 </a:tc>
               </a:tr>
-              <a:tr h="487680">
+              <a:tr h="472440">
                 <a:tc>
                   <a:txBody>
                     <a:bodyPr/>
@@ -5627,7 +5627,7 @@
                   </a:tcPr>
                 </a:tc>
               </a:tr>
-              <a:tr h="487680">
+              <a:tr h="472440">
                 <a:tc>
                   <a:txBody>
                     <a:bodyPr/>
@@ -5765,7 +5765,7 @@
                   </a:tcPr>
                 </a:tc>
               </a:tr>
-              <a:tr h="487680">
+              <a:tr h="472440">
                 <a:tc>
                   <a:txBody>
                     <a:bodyPr/>
@@ -5903,7 +5903,7 @@
                   </a:tcPr>
                 </a:tc>
               </a:tr>
-              <a:tr h="487680">
+              <a:tr h="472440">
                 <a:tc>
                   <a:txBody>
                     <a:bodyPr/>
